--- a/Novosibirsk_State_University/Английский язык/6 семестр/Homework/The promising discovery.pptx
+++ b/Novosibirsk_State_University/Английский язык/6 семестр/Homework/The promising discovery.pptx
@@ -263,7 +263,7 @@
           <a:p>
             <a:fld id="{3798035B-3557-4665-A009-B801C18140F0}" type="datetimeFigureOut">
               <a:rPr lang="ru-RU" smtClean="0"/>
-              <a:t>03.04.2025</a:t>
+              <a:t>19.12.2025</a:t>
             </a:fld>
             <a:endParaRPr lang="ru-RU"/>
           </a:p>
@@ -461,7 +461,7 @@
           <a:p>
             <a:fld id="{3798035B-3557-4665-A009-B801C18140F0}" type="datetimeFigureOut">
               <a:rPr lang="ru-RU" smtClean="0"/>
-              <a:t>03.04.2025</a:t>
+              <a:t>19.12.2025</a:t>
             </a:fld>
             <a:endParaRPr lang="ru-RU"/>
           </a:p>
@@ -669,7 +669,7 @@
           <a:p>
             <a:fld id="{3798035B-3557-4665-A009-B801C18140F0}" type="datetimeFigureOut">
               <a:rPr lang="ru-RU" smtClean="0"/>
-              <a:t>03.04.2025</a:t>
+              <a:t>19.12.2025</a:t>
             </a:fld>
             <a:endParaRPr lang="ru-RU"/>
           </a:p>
@@ -867,7 +867,7 @@
           <a:p>
             <a:fld id="{3798035B-3557-4665-A009-B801C18140F0}" type="datetimeFigureOut">
               <a:rPr lang="ru-RU" smtClean="0"/>
-              <a:t>03.04.2025</a:t>
+              <a:t>19.12.2025</a:t>
             </a:fld>
             <a:endParaRPr lang="ru-RU"/>
           </a:p>
@@ -1142,7 +1142,7 @@
           <a:p>
             <a:fld id="{3798035B-3557-4665-A009-B801C18140F0}" type="datetimeFigureOut">
               <a:rPr lang="ru-RU" smtClean="0"/>
-              <a:t>03.04.2025</a:t>
+              <a:t>19.12.2025</a:t>
             </a:fld>
             <a:endParaRPr lang="ru-RU"/>
           </a:p>
@@ -1407,7 +1407,7 @@
           <a:p>
             <a:fld id="{3798035B-3557-4665-A009-B801C18140F0}" type="datetimeFigureOut">
               <a:rPr lang="ru-RU" smtClean="0"/>
-              <a:t>03.04.2025</a:t>
+              <a:t>19.12.2025</a:t>
             </a:fld>
             <a:endParaRPr lang="ru-RU"/>
           </a:p>
@@ -1819,7 +1819,7 @@
           <a:p>
             <a:fld id="{3798035B-3557-4665-A009-B801C18140F0}" type="datetimeFigureOut">
               <a:rPr lang="ru-RU" smtClean="0"/>
-              <a:t>03.04.2025</a:t>
+              <a:t>19.12.2025</a:t>
             </a:fld>
             <a:endParaRPr lang="ru-RU"/>
           </a:p>
@@ -1960,7 +1960,7 @@
           <a:p>
             <a:fld id="{3798035B-3557-4665-A009-B801C18140F0}" type="datetimeFigureOut">
               <a:rPr lang="ru-RU" smtClean="0"/>
-              <a:t>03.04.2025</a:t>
+              <a:t>19.12.2025</a:t>
             </a:fld>
             <a:endParaRPr lang="ru-RU"/>
           </a:p>
@@ -2073,7 +2073,7 @@
           <a:p>
             <a:fld id="{3798035B-3557-4665-A009-B801C18140F0}" type="datetimeFigureOut">
               <a:rPr lang="ru-RU" smtClean="0"/>
-              <a:t>03.04.2025</a:t>
+              <a:t>19.12.2025</a:t>
             </a:fld>
             <a:endParaRPr lang="ru-RU"/>
           </a:p>
@@ -2384,7 +2384,7 @@
           <a:p>
             <a:fld id="{3798035B-3557-4665-A009-B801C18140F0}" type="datetimeFigureOut">
               <a:rPr lang="ru-RU" smtClean="0"/>
-              <a:t>03.04.2025</a:t>
+              <a:t>19.12.2025</a:t>
             </a:fld>
             <a:endParaRPr lang="ru-RU"/>
           </a:p>
@@ -2672,7 +2672,7 @@
           <a:p>
             <a:fld id="{3798035B-3557-4665-A009-B801C18140F0}" type="datetimeFigureOut">
               <a:rPr lang="ru-RU" smtClean="0"/>
-              <a:t>03.04.2025</a:t>
+              <a:t>19.12.2025</a:t>
             </a:fld>
             <a:endParaRPr lang="ru-RU"/>
           </a:p>
@@ -2913,7 +2913,7 @@
           <a:p>
             <a:fld id="{3798035B-3557-4665-A009-B801C18140F0}" type="datetimeFigureOut">
               <a:rPr lang="ru-RU" smtClean="0"/>
-              <a:t>03.04.2025</a:t>
+              <a:t>19.12.2025</a:t>
             </a:fld>
             <a:endParaRPr lang="ru-RU"/>
           </a:p>
@@ -3405,6 +3405,8 @@
                     <a:lumMod val="95000"/>
                   </a:schemeClr>
                 </a:solidFill>
+                <a:latin typeface="Times New Roman" panose="02020603050405020304" pitchFamily="18" charset="0"/>
+                <a:cs typeface="Times New Roman" panose="02020603050405020304" pitchFamily="18" charset="0"/>
               </a:rPr>
               <a:t>Quantum computers – a computing revolution</a:t>
             </a:r>
@@ -3414,6 +3416,8 @@
                   <a:lumMod val="95000"/>
                 </a:schemeClr>
               </a:solidFill>
+              <a:latin typeface="Times New Roman" panose="02020603050405020304" pitchFamily="18" charset="0"/>
+              <a:cs typeface="Times New Roman" panose="02020603050405020304" pitchFamily="18" charset="0"/>
             </a:endParaRPr>
           </a:p>
         </p:txBody>
@@ -3453,6 +3457,8 @@
                     <a:lumMod val="95000"/>
                   </a:schemeClr>
                 </a:solidFill>
+                <a:latin typeface="Times New Roman" panose="02020603050405020304" pitchFamily="18" charset="0"/>
+                <a:cs typeface="Times New Roman" panose="02020603050405020304" pitchFamily="18" charset="0"/>
               </a:rPr>
               <a:t>A promising discovery that will change the future</a:t>
             </a:r>
@@ -3462,6 +3468,8 @@
                   <a:lumMod val="95000"/>
                 </a:schemeClr>
               </a:solidFill>
+              <a:latin typeface="Times New Roman" panose="02020603050405020304" pitchFamily="18" charset="0"/>
+              <a:cs typeface="Times New Roman" panose="02020603050405020304" pitchFamily="18" charset="0"/>
             </a:endParaRPr>
           </a:p>
         </p:txBody>
@@ -3569,6 +3577,8 @@
                 <a:solidFill>
                   <a:schemeClr val="bg1"/>
                 </a:solidFill>
+                <a:latin typeface="Times New Roman" panose="02020603050405020304" pitchFamily="18" charset="0"/>
+                <a:cs typeface="Times New Roman" panose="02020603050405020304" pitchFamily="18" charset="0"/>
               </a:rPr>
               <a:t>Presentation plan</a:t>
             </a:r>
@@ -3576,6 +3586,8 @@
               <a:solidFill>
                 <a:schemeClr val="bg1"/>
               </a:solidFill>
+              <a:latin typeface="Times New Roman" panose="02020603050405020304" pitchFamily="18" charset="0"/>
+              <a:cs typeface="Times New Roman" panose="02020603050405020304" pitchFamily="18" charset="0"/>
             </a:endParaRPr>
           </a:p>
         </p:txBody>
@@ -3618,6 +3630,8 @@
                 <a:solidFill>
                   <a:schemeClr val="bg1"/>
                 </a:solidFill>
+                <a:latin typeface="Times New Roman" panose="02020603050405020304" pitchFamily="18" charset="0"/>
+                <a:cs typeface="Times New Roman" panose="02020603050405020304" pitchFamily="18" charset="0"/>
               </a:rPr>
               <a:t>Introduction – What is a quantum computer?</a:t>
             </a:r>
@@ -3633,6 +3647,8 @@
                 <a:solidFill>
                   <a:schemeClr val="bg1"/>
                 </a:solidFill>
+                <a:latin typeface="Times New Roman" panose="02020603050405020304" pitchFamily="18" charset="0"/>
+                <a:cs typeface="Times New Roman" panose="02020603050405020304" pitchFamily="18" charset="0"/>
               </a:rPr>
               <a:t>How it works – Qubits, superposition, and entanglement.</a:t>
             </a:r>
@@ -3648,6 +3664,8 @@
                 <a:solidFill>
                   <a:schemeClr val="bg1"/>
                 </a:solidFill>
+                <a:latin typeface="Times New Roman" panose="02020603050405020304" pitchFamily="18" charset="0"/>
+                <a:cs typeface="Times New Roman" panose="02020603050405020304" pitchFamily="18" charset="0"/>
               </a:rPr>
               <a:t>Breakthroughs and applications – Medicine, cryptography, AI.</a:t>
             </a:r>
@@ -3663,6 +3681,8 @@
                 <a:solidFill>
                   <a:schemeClr val="bg1"/>
                 </a:solidFill>
+                <a:latin typeface="Times New Roman" panose="02020603050405020304" pitchFamily="18" charset="0"/>
+                <a:cs typeface="Times New Roman" panose="02020603050405020304" pitchFamily="18" charset="0"/>
               </a:rPr>
               <a:t>Challenges and future – When will quantum computers become mainstream?</a:t>
             </a:r>
@@ -3678,6 +3698,8 @@
                 <a:solidFill>
                   <a:schemeClr val="bg1"/>
                 </a:solidFill>
+                <a:latin typeface="Times New Roman" panose="02020603050405020304" pitchFamily="18" charset="0"/>
+                <a:cs typeface="Times New Roman" panose="02020603050405020304" pitchFamily="18" charset="0"/>
               </a:rPr>
               <a:t>Conclusion – Why this discovery matters.</a:t>
             </a:r>
@@ -3685,6 +3707,8 @@
               <a:solidFill>
                 <a:schemeClr val="bg1"/>
               </a:solidFill>
+              <a:latin typeface="Times New Roman" panose="02020603050405020304" pitchFamily="18" charset="0"/>
+              <a:cs typeface="Times New Roman" panose="02020603050405020304" pitchFamily="18" charset="0"/>
             </a:endParaRPr>
           </a:p>
         </p:txBody>
@@ -3744,11 +3768,17 @@
           <a:p>
             <a:pPr algn="ctr"/>
             <a:r>
-              <a:rPr lang="en-US" sz="4800" dirty="0"/>
+              <a:rPr lang="en-US" sz="4800" dirty="0">
+                <a:latin typeface="Times New Roman" panose="02020603050405020304" pitchFamily="18" charset="0"/>
+                <a:cs typeface="Times New Roman" panose="02020603050405020304" pitchFamily="18" charset="0"/>
+              </a:rPr>
               <a:t>What is a quantum computer and how does it work</a:t>
             </a:r>
             <a:r>
-              <a:rPr lang="ru-RU" sz="4800" dirty="0"/>
+              <a:rPr lang="ru-RU" sz="4800" dirty="0">
+                <a:latin typeface="Times New Roman" panose="02020603050405020304" pitchFamily="18" charset="0"/>
+                <a:cs typeface="Times New Roman" panose="02020603050405020304" pitchFamily="18" charset="0"/>
+              </a:rPr>
               <a:t>?</a:t>
             </a:r>
           </a:p>
@@ -3908,10 +3938,16 @@
           <a:p>
             <a:pPr algn="ctr"/>
             <a:r>
-              <a:rPr lang="en-US" sz="4400" dirty="0"/>
+              <a:rPr lang="en-US" sz="4400" dirty="0">
+                <a:latin typeface="Times New Roman" panose="02020603050405020304" pitchFamily="18" charset="0"/>
+                <a:cs typeface="Times New Roman" panose="02020603050405020304" pitchFamily="18" charset="0"/>
+              </a:rPr>
               <a:t>Problems of quantum computers</a:t>
             </a:r>
-            <a:endParaRPr lang="ru-RU" sz="4400" dirty="0"/>
+            <a:endParaRPr lang="ru-RU" sz="4400" dirty="0">
+              <a:latin typeface="Times New Roman" panose="02020603050405020304" pitchFamily="18" charset="0"/>
+              <a:cs typeface="Times New Roman" panose="02020603050405020304" pitchFamily="18" charset="0"/>
+            </a:endParaRPr>
           </a:p>
         </p:txBody>
       </p:sp>
@@ -3946,10 +3982,16 @@
               <a:buChar char="•"/>
             </a:pPr>
             <a:r>
-              <a:rPr lang="en-US" dirty="0"/>
+              <a:rPr lang="en-US" dirty="0">
+                <a:latin typeface="Times New Roman" panose="02020603050405020304" pitchFamily="18" charset="0"/>
+                <a:cs typeface="Times New Roman" panose="02020603050405020304" pitchFamily="18" charset="0"/>
+              </a:rPr>
               <a:t>Decoherence</a:t>
             </a:r>
-            <a:endParaRPr lang="ru-RU" dirty="0"/>
+            <a:endParaRPr lang="ru-RU" dirty="0">
+              <a:latin typeface="Times New Roman" panose="02020603050405020304" pitchFamily="18" charset="0"/>
+              <a:cs typeface="Times New Roman" panose="02020603050405020304" pitchFamily="18" charset="0"/>
+            </a:endParaRPr>
           </a:p>
           <a:p>
             <a:pPr marL="342900" indent="-342900" algn="l">
@@ -3957,10 +3999,16 @@
               <a:buChar char="•"/>
             </a:pPr>
             <a:r>
-              <a:rPr lang="en-US" dirty="0"/>
+              <a:rPr lang="en-US" dirty="0">
+                <a:latin typeface="Times New Roman" panose="02020603050405020304" pitchFamily="18" charset="0"/>
+                <a:cs typeface="Times New Roman" panose="02020603050405020304" pitchFamily="18" charset="0"/>
+              </a:rPr>
               <a:t>Scalability</a:t>
             </a:r>
-            <a:endParaRPr lang="ru-RU" dirty="0"/>
+            <a:endParaRPr lang="ru-RU" dirty="0">
+              <a:latin typeface="Times New Roman" panose="02020603050405020304" pitchFamily="18" charset="0"/>
+              <a:cs typeface="Times New Roman" panose="02020603050405020304" pitchFamily="18" charset="0"/>
+            </a:endParaRPr>
           </a:p>
           <a:p>
             <a:pPr marL="342900" indent="-342900" algn="l">
@@ -3968,7 +4016,10 @@
               <a:buChar char="•"/>
             </a:pPr>
             <a:r>
-              <a:rPr lang="en-US" dirty="0"/>
+              <a:rPr lang="en-US" dirty="0">
+                <a:latin typeface="Times New Roman" panose="02020603050405020304" pitchFamily="18" charset="0"/>
+                <a:cs typeface="Times New Roman" panose="02020603050405020304" pitchFamily="18" charset="0"/>
+              </a:rPr>
               <a:t>Noise and errors</a:t>
             </a:r>
           </a:p>
@@ -3978,7 +4029,10 @@
               <a:buChar char="•"/>
             </a:pPr>
             <a:r>
-              <a:rPr lang="en-US" dirty="0"/>
+              <a:rPr lang="en-US" dirty="0">
+                <a:latin typeface="Times New Roman" panose="02020603050405020304" pitchFamily="18" charset="0"/>
+                <a:cs typeface="Times New Roman" panose="02020603050405020304" pitchFamily="18" charset="0"/>
+              </a:rPr>
               <a:t>Cooling system</a:t>
             </a:r>
           </a:p>
@@ -3988,7 +4042,10 @@
               <a:buChar char="•"/>
             </a:pPr>
             <a:r>
-              <a:rPr lang="en-US" dirty="0"/>
+              <a:rPr lang="en-US" dirty="0">
+                <a:latin typeface="Times New Roman" panose="02020603050405020304" pitchFamily="18" charset="0"/>
+                <a:cs typeface="Times New Roman" panose="02020603050405020304" pitchFamily="18" charset="0"/>
+              </a:rPr>
               <a:t>Lack of quantum algorithms</a:t>
             </a:r>
           </a:p>
@@ -3998,10 +4055,16 @@
               <a:buChar char="•"/>
             </a:pPr>
             <a:r>
-              <a:rPr lang="en-US" dirty="0"/>
+              <a:rPr lang="en-US" dirty="0">
+                <a:latin typeface="Times New Roman" panose="02020603050405020304" pitchFamily="18" charset="0"/>
+                <a:cs typeface="Times New Roman" panose="02020603050405020304" pitchFamily="18" charset="0"/>
+              </a:rPr>
               <a:t>Cybersecurity risks</a:t>
             </a:r>
-            <a:endParaRPr lang="ru-RU" dirty="0"/>
+            <a:endParaRPr lang="ru-RU" dirty="0">
+              <a:latin typeface="Times New Roman" panose="02020603050405020304" pitchFamily="18" charset="0"/>
+              <a:cs typeface="Times New Roman" panose="02020603050405020304" pitchFamily="18" charset="0"/>
+            </a:endParaRPr>
           </a:p>
         </p:txBody>
       </p:sp>
@@ -4145,6 +4208,8 @@
                 <a:solidFill>
                   <a:schemeClr val="bg1"/>
                 </a:solidFill>
+                <a:latin typeface="Times New Roman" panose="02020603050405020304" pitchFamily="18" charset="0"/>
+                <a:cs typeface="Times New Roman" panose="02020603050405020304" pitchFamily="18" charset="0"/>
               </a:rPr>
               <a:t>Thank you for your attention!</a:t>
             </a:r>
@@ -4152,6 +4217,8 @@
               <a:solidFill>
                 <a:schemeClr val="bg1"/>
               </a:solidFill>
+              <a:latin typeface="Times New Roman" panose="02020603050405020304" pitchFamily="18" charset="0"/>
+              <a:cs typeface="Times New Roman" panose="02020603050405020304" pitchFamily="18" charset="0"/>
             </a:endParaRPr>
           </a:p>
         </p:txBody>
